--- a/slides/Toan11/Slide_TOAN11_CD1_Bai2_T3-4.pptx
+++ b/slides/Toan11/Slide_TOAN11_CD1_Bai2_T3-4.pptx
@@ -3761,7 +3761,7 @@
                 </a:r>
                 <a:r>
                   <a:rPr lang="vi-VN"/>
-                  <a:t>\vec{u}=\overrightarrow{A'A}=(-1;-3)</a:t>
+                  <a:t>\vec{u}=\overrightarrow{A'A}=(−1;−3)</a:t>
                 </a:r>
               </a:p>
               <a:p>
@@ -6429,7 +6429,7 @@
                 </a:pPr>
                 <a:r>
                   <a:rPr lang="vi-VN"/>
-                  <a:t>T_{-\vec{u}}</a:t>
+                  <a:t>T_{−\vec{u}}</a:t>
                 </a:r>
                 <a:r>
                   <a:rPr sz="2400">
@@ -8747,7 +8747,7 @@
                 </a:r>
                 <a:r>
                   <a:rPr lang="vi-VN"/>
-                  <a:t>(C):(x-1)^2+(y+2)^2=25</a:t>
+                  <a:t>(C):(x−1)^2+(y+2)^2=25</a:t>
                 </a:r>
                 <a:r>
                   <a:rPr sz="2400" b="1">
@@ -9050,7 +9050,7 @@
                 </a:r>
                 <a:r>
                   <a:rPr lang="vi-VN"/>
-                  <a:t>(C'):(x-4)^2+(y-2)^2=25</a:t>
+                  <a:t>(C'):(x−4)^2+(y−2)^2=25</a:t>
                 </a:r>
               </a:p>
             </p:txBody>
